--- a/assets/powerpoints/module-n3-epicerie/C2-les-mots-qui-mesurent.pptx
+++ b/assets/powerpoints/module-n3-epicerie/C2-les-mots-qui-mesurent.pptx
@@ -13048,7 +13048,61 @@
                 </a:solidFill>
                 <a:latin typeface="Verdana"/>
               </a:rPr>
-              <a:t>Une &lt;b&gt;livre&lt;/b&gt; pèse environ 450 grammes, un peu moins d'un demi-kilo. La viande s'annonce souvent à la livre ; les fruits et légumes, au kilo. Sur l'étiquette du rayon, les deux prix sont souvent écrits : &lt;b&gt;3,99 $ / lb&lt;/b&gt; et &lt;b&gt;8,80 $ / kg&lt;/b&gt;.</a:t>
+              <a:t>Une </a:t>
+            </a:r>
+            <a:r>
+              <a:rPr sz="2000" b="1" i="0">
+                <a:solidFill>
+                  <a:srgbClr val="4B4F52"/>
+                </a:solidFill>
+                <a:latin typeface="Verdana"/>
+              </a:rPr>
+              <a:t>livre</a:t>
+            </a:r>
+            <a:r>
+              <a:rPr sz="2000" b="0" i="0">
+                <a:solidFill>
+                  <a:srgbClr val="4B4F52"/>
+                </a:solidFill>
+                <a:latin typeface="Verdana"/>
+              </a:rPr>
+              <a:t> pèse environ 450 grammes, un peu moins d'un demi-kilo. La viande s'annonce souvent à la livre ; les fruits et légumes, au kilo. Sur l'étiquette du rayon, les deux prix sont souvent écrits : </a:t>
+            </a:r>
+            <a:r>
+              <a:rPr sz="2000" b="1" i="0">
+                <a:solidFill>
+                  <a:srgbClr val="4B4F52"/>
+                </a:solidFill>
+                <a:latin typeface="Verdana"/>
+              </a:rPr>
+              <a:t>3,99 $ / lb</a:t>
+            </a:r>
+            <a:r>
+              <a:rPr sz="2000" b="0" i="0">
+                <a:solidFill>
+                  <a:srgbClr val="4B4F52"/>
+                </a:solidFill>
+                <a:latin typeface="Verdana"/>
+              </a:rPr>
+              <a:t> et </a:t>
+            </a:r>
+            <a:r>
+              <a:rPr sz="2000" b="1" i="0">
+                <a:solidFill>
+                  <a:srgbClr val="4B4F52"/>
+                </a:solidFill>
+                <a:latin typeface="Verdana"/>
+              </a:rPr>
+              <a:t>8,80 $ / kg</a:t>
+            </a:r>
+            <a:r>
+              <a:rPr sz="2000" b="0" i="0">
+                <a:solidFill>
+                  <a:srgbClr val="4B4F52"/>
+                </a:solidFill>
+                <a:latin typeface="Verdana"/>
+              </a:rPr>
+              <a:t>.</a:t>
             </a:r>
           </a:p>
         </p:txBody>
@@ -13395,7 +13449,79 @@
                 </a:solidFill>
                 <a:latin typeface="Verdana"/>
               </a:rPr>
-              <a:t>Le mot de quantité est toujours suivi de &lt;b&gt;de&lt;/b&gt; — et de rien d'autre. Devant une voyelle, « de » devient &lt;b&gt;d'&lt;/b&gt; : une bouteille &lt;b&gt;d'&lt;/b&gt;huile, une douzaine &lt;b&gt;d'&lt;/b&gt;œufs. On ne dit jamais « un kilo &lt;s&gt;des&lt;/s&gt; pommes ».</a:t>
+              <a:t>Le mot de quantité est toujours suivi de </a:t>
+            </a:r>
+            <a:r>
+              <a:rPr sz="2000" b="1" i="0">
+                <a:solidFill>
+                  <a:srgbClr val="4B4F52"/>
+                </a:solidFill>
+                <a:latin typeface="Verdana"/>
+              </a:rPr>
+              <a:t>de</a:t>
+            </a:r>
+            <a:r>
+              <a:rPr sz="2000" b="0" i="0">
+                <a:solidFill>
+                  <a:srgbClr val="4B4F52"/>
+                </a:solidFill>
+                <a:latin typeface="Verdana"/>
+              </a:rPr>
+              <a:t> — et de rien d'autre. Devant une voyelle, « de » devient </a:t>
+            </a:r>
+            <a:r>
+              <a:rPr sz="2000" b="1" i="0">
+                <a:solidFill>
+                  <a:srgbClr val="4B4F52"/>
+                </a:solidFill>
+                <a:latin typeface="Verdana"/>
+              </a:rPr>
+              <a:t>d'</a:t>
+            </a:r>
+            <a:r>
+              <a:rPr sz="2000" b="0" i="0">
+                <a:solidFill>
+                  <a:srgbClr val="4B4F52"/>
+                </a:solidFill>
+                <a:latin typeface="Verdana"/>
+              </a:rPr>
+              <a:t> : une bouteille </a:t>
+            </a:r>
+            <a:r>
+              <a:rPr sz="2000" b="1" i="0">
+                <a:solidFill>
+                  <a:srgbClr val="4B4F52"/>
+                </a:solidFill>
+                <a:latin typeface="Verdana"/>
+              </a:rPr>
+              <a:t>d'</a:t>
+            </a:r>
+            <a:r>
+              <a:rPr sz="2000" b="0" i="0">
+                <a:solidFill>
+                  <a:srgbClr val="4B4F52"/>
+                </a:solidFill>
+                <a:latin typeface="Verdana"/>
+              </a:rPr>
+              <a:t>huile, une douzaine </a:t>
+            </a:r>
+            <a:r>
+              <a:rPr sz="2000" b="1" i="0">
+                <a:solidFill>
+                  <a:srgbClr val="4B4F52"/>
+                </a:solidFill>
+                <a:latin typeface="Verdana"/>
+              </a:rPr>
+              <a:t>d'</a:t>
+            </a:r>
+            <a:r>
+              <a:rPr sz="2000" b="0" i="0">
+                <a:solidFill>
+                  <a:srgbClr val="4B4F52"/>
+                </a:solidFill>
+                <a:latin typeface="Verdana"/>
+              </a:rPr>
+              <a:t>œufs. On ne dit jamais « un kilo &lt;s&gt;des&lt;/s&gt; pommes ».</a:t>
             </a:r>
           </a:p>
         </p:txBody>
